--- a/PBI/PBI_Background.pptx
+++ b/PBI/PBI_Background.pptx
@@ -104,13 +104,18 @@
       </a:defRPr>
     </a:lvl9pPr>
   </p:defaultTextStyle>
+  <p:extLst>
+    <p:ext uri="{EFAFB233-063F-42B5-8137-9DF3F51BA10A}">
+      <p15:sldGuideLst xmlns:p15="http://schemas.microsoft.com/office/powerpoint/2012/main"/>
+    </p:ext>
+  </p:extLst>
 </p:presentation>
 </file>
 
 <file path=ppt/revisionInfo.xml><?xml version="1.0" encoding="utf-8"?>
 <p1510:revInfo xmlns:a="http://schemas.openxmlformats.org/drawingml/2006/main" xmlns:r="http://schemas.openxmlformats.org/officeDocument/2006/relationships" xmlns:p1510="http://schemas.microsoft.com/office/powerpoint/2015/10/main">
   <p1510:revLst>
-    <p1510:client id="{E440485E-DD39-4294-BEEB-772F9EBAF5B0}" v="6" dt="2025-05-10T11:58:17.021"/>
+    <p1510:client id="{E440485E-DD39-4294-BEEB-772F9EBAF5B0}" v="7" dt="2025-05-12T17:12:45.710"/>
   </p1510:revLst>
 </p1510:revInfo>
 </file>
@@ -120,7 +125,7 @@
   <pc:docChgLst>
     <pc:chgData name="Kamil Soszka" userId="c65f95d2-f833-4345-97e3-6df8efb11cb8" providerId="ADAL" clId="{E440485E-DD39-4294-BEEB-772F9EBAF5B0}"/>
     <pc:docChg chg="custSel addSld delSld modSld">
-      <pc:chgData name="Kamil Soszka" userId="c65f95d2-f833-4345-97e3-6df8efb11cb8" providerId="ADAL" clId="{E440485E-DD39-4294-BEEB-772F9EBAF5B0}" dt="2025-05-10T12:00:28.731" v="43" actId="47"/>
+      <pc:chgData name="Kamil Soszka" userId="c65f95d2-f833-4345-97e3-6df8efb11cb8" providerId="ADAL" clId="{E440485E-DD39-4294-BEEB-772F9EBAF5B0}" dt="2025-05-12T19:14:32.590" v="54" actId="2696"/>
       <pc:docMkLst>
         <pc:docMk/>
       </pc:docMkLst>
@@ -137,22 +142,6 @@
           <pc:docMk/>
           <pc:sldMk cId="1958084871" sldId="257"/>
         </pc:sldMkLst>
-        <pc:spChg chg="add del mod">
-          <ac:chgData name="Kamil Soszka" userId="c65f95d2-f833-4345-97e3-6df8efb11cb8" providerId="ADAL" clId="{E440485E-DD39-4294-BEEB-772F9EBAF5B0}" dt="2025-05-10T11:57:26.523" v="14" actId="21"/>
-          <ac:spMkLst>
-            <pc:docMk/>
-            <pc:sldMk cId="1958084871" sldId="257"/>
-            <ac:spMk id="4" creationId="{EE88718B-D1B0-3CFD-3F7B-A8E91B128BDD}"/>
-          </ac:spMkLst>
-        </pc:spChg>
-        <pc:picChg chg="add">
-          <ac:chgData name="Kamil Soszka" userId="c65f95d2-f833-4345-97e3-6df8efb11cb8" providerId="ADAL" clId="{E440485E-DD39-4294-BEEB-772F9EBAF5B0}" dt="2025-05-10T11:53:56.731" v="3" actId="22"/>
-          <ac:picMkLst>
-            <pc:docMk/>
-            <pc:sldMk cId="1958084871" sldId="257"/>
-            <ac:picMk id="3" creationId="{64FC04EC-F9F4-AB3D-35CA-7D37A5A20442}"/>
-          </ac:picMkLst>
-        </pc:picChg>
       </pc:sldChg>
       <pc:sldChg chg="addSp modSp new mod">
         <pc:chgData name="Kamil Soszka" userId="c65f95d2-f833-4345-97e3-6df8efb11cb8" providerId="ADAL" clId="{E440485E-DD39-4294-BEEB-772F9EBAF5B0}" dt="2025-05-10T12:00:09.285" v="42" actId="208"/>
@@ -217,6 +206,37 @@
           </ac:cxnSpMkLst>
         </pc:cxnChg>
       </pc:sldChg>
+      <pc:sldChg chg="addSp modSp new del mod">
+        <pc:chgData name="Kamil Soszka" userId="c65f95d2-f833-4345-97e3-6df8efb11cb8" providerId="ADAL" clId="{E440485E-DD39-4294-BEEB-772F9EBAF5B0}" dt="2025-05-12T19:14:32.590" v="54" actId="2696"/>
+        <pc:sldMkLst>
+          <pc:docMk/>
+          <pc:sldMk cId="494166015" sldId="259"/>
+        </pc:sldMkLst>
+        <pc:picChg chg="add mod">
+          <ac:chgData name="Kamil Soszka" userId="c65f95d2-f833-4345-97e3-6df8efb11cb8" providerId="ADAL" clId="{E440485E-DD39-4294-BEEB-772F9EBAF5B0}" dt="2025-05-12T17:13:18.473" v="52" actId="554"/>
+          <ac:picMkLst>
+            <pc:docMk/>
+            <pc:sldMk cId="494166015" sldId="259"/>
+            <ac:picMk id="3" creationId="{4DB19211-ED99-D484-72B4-01FB3ECCD60E}"/>
+          </ac:picMkLst>
+        </pc:picChg>
+        <pc:picChg chg="add mod">
+          <ac:chgData name="Kamil Soszka" userId="c65f95d2-f833-4345-97e3-6df8efb11cb8" providerId="ADAL" clId="{E440485E-DD39-4294-BEEB-772F9EBAF5B0}" dt="2025-05-12T17:13:21.611" v="53" actId="408"/>
+          <ac:picMkLst>
+            <pc:docMk/>
+            <pc:sldMk cId="494166015" sldId="259"/>
+            <ac:picMk id="5" creationId="{8E2BA51A-8BEF-4923-A6CF-8E43766C0C10}"/>
+          </ac:picMkLst>
+        </pc:picChg>
+        <pc:picChg chg="add mod">
+          <ac:chgData name="Kamil Soszka" userId="c65f95d2-f833-4345-97e3-6df8efb11cb8" providerId="ADAL" clId="{E440485E-DD39-4294-BEEB-772F9EBAF5B0}" dt="2025-05-12T17:13:18.473" v="52" actId="554"/>
+          <ac:picMkLst>
+            <pc:docMk/>
+            <pc:sldMk cId="494166015" sldId="259"/>
+            <ac:picMk id="7" creationId="{0CFB0DBA-DA5F-7F0F-B776-F28BA360CBBA}"/>
+          </ac:picMkLst>
+        </pc:picChg>
+      </pc:sldChg>
     </pc:docChg>
   </pc:docChgLst>
 </pc:chgInfo>
@@ -369,7 +389,7 @@
           <a:p>
             <a:fld id="{71BFA907-9818-48CA-A160-72C000114032}" type="datetimeFigureOut">
               <a:rPr lang="en-US" smtClean="0"/>
-              <a:t>5/10/2025</a:t>
+              <a:t>5/12/2025</a:t>
             </a:fld>
             <a:endParaRPr lang="en-US"/>
           </a:p>
@@ -567,7 +587,7 @@
           <a:p>
             <a:fld id="{71BFA907-9818-48CA-A160-72C000114032}" type="datetimeFigureOut">
               <a:rPr lang="en-US" smtClean="0"/>
-              <a:t>5/10/2025</a:t>
+              <a:t>5/12/2025</a:t>
             </a:fld>
             <a:endParaRPr lang="en-US"/>
           </a:p>
@@ -775,7 +795,7 @@
           <a:p>
             <a:fld id="{71BFA907-9818-48CA-A160-72C000114032}" type="datetimeFigureOut">
               <a:rPr lang="en-US" smtClean="0"/>
-              <a:t>5/10/2025</a:t>
+              <a:t>5/12/2025</a:t>
             </a:fld>
             <a:endParaRPr lang="en-US"/>
           </a:p>
@@ -973,7 +993,7 @@
           <a:p>
             <a:fld id="{71BFA907-9818-48CA-A160-72C000114032}" type="datetimeFigureOut">
               <a:rPr lang="en-US" smtClean="0"/>
-              <a:t>5/10/2025</a:t>
+              <a:t>5/12/2025</a:t>
             </a:fld>
             <a:endParaRPr lang="en-US"/>
           </a:p>
@@ -1248,7 +1268,7 @@
           <a:p>
             <a:fld id="{71BFA907-9818-48CA-A160-72C000114032}" type="datetimeFigureOut">
               <a:rPr lang="en-US" smtClean="0"/>
-              <a:t>5/10/2025</a:t>
+              <a:t>5/12/2025</a:t>
             </a:fld>
             <a:endParaRPr lang="en-US"/>
           </a:p>
@@ -1513,7 +1533,7 @@
           <a:p>
             <a:fld id="{71BFA907-9818-48CA-A160-72C000114032}" type="datetimeFigureOut">
               <a:rPr lang="en-US" smtClean="0"/>
-              <a:t>5/10/2025</a:t>
+              <a:t>5/12/2025</a:t>
             </a:fld>
             <a:endParaRPr lang="en-US"/>
           </a:p>
@@ -1925,7 +1945,7 @@
           <a:p>
             <a:fld id="{71BFA907-9818-48CA-A160-72C000114032}" type="datetimeFigureOut">
               <a:rPr lang="en-US" smtClean="0"/>
-              <a:t>5/10/2025</a:t>
+              <a:t>5/12/2025</a:t>
             </a:fld>
             <a:endParaRPr lang="en-US"/>
           </a:p>
@@ -2066,7 +2086,7 @@
           <a:p>
             <a:fld id="{71BFA907-9818-48CA-A160-72C000114032}" type="datetimeFigureOut">
               <a:rPr lang="en-US" smtClean="0"/>
-              <a:t>5/10/2025</a:t>
+              <a:t>5/12/2025</a:t>
             </a:fld>
             <a:endParaRPr lang="en-US"/>
           </a:p>
@@ -2179,7 +2199,7 @@
           <a:p>
             <a:fld id="{71BFA907-9818-48CA-A160-72C000114032}" type="datetimeFigureOut">
               <a:rPr lang="en-US" smtClean="0"/>
-              <a:t>5/10/2025</a:t>
+              <a:t>5/12/2025</a:t>
             </a:fld>
             <a:endParaRPr lang="en-US"/>
           </a:p>
@@ -2490,7 +2510,7 @@
           <a:p>
             <a:fld id="{71BFA907-9818-48CA-A160-72C000114032}" type="datetimeFigureOut">
               <a:rPr lang="en-US" smtClean="0"/>
-              <a:t>5/10/2025</a:t>
+              <a:t>5/12/2025</a:t>
             </a:fld>
             <a:endParaRPr lang="en-US"/>
           </a:p>
@@ -2778,7 +2798,7 @@
           <a:p>
             <a:fld id="{71BFA907-9818-48CA-A160-72C000114032}" type="datetimeFigureOut">
               <a:rPr lang="en-US" smtClean="0"/>
-              <a:t>5/10/2025</a:t>
+              <a:t>5/12/2025</a:t>
             </a:fld>
             <a:endParaRPr lang="en-US"/>
           </a:p>
@@ -3019,7 +3039,7 @@
           <a:p>
             <a:fld id="{71BFA907-9818-48CA-A160-72C000114032}" type="datetimeFigureOut">
               <a:rPr lang="en-US" smtClean="0"/>
-              <a:t>5/10/2025</a:t>
+              <a:t>5/12/2025</a:t>
             </a:fld>
             <a:endParaRPr lang="en-US"/>
           </a:p>
